--- a/python_course/chapter_10_error_handling/presentation.pptx
+++ b/python_course/chapter_10_error_handling/presentation.pptx
@@ -20,7 +20,7 @@
     <p:sldId id="268" r:id="rId19"/>
     <p:sldId id="269" r:id="rId20"/>
   </p:sldIdLst>
-  <p:sldSz cx="9144000" cy="6858000" type="screen4x3"/>
+  <p:sldSz cx="12191695" cy="6858000" type="screen4x3"/>
   <p:notesSz cx="6858000" cy="9144000"/>
   <p:defaultTextStyle>
     <a:defPPr>
@@ -3110,7 +3110,7 @@
         <p:spPr>
           <a:xfrm>
             <a:off x="0" y="0"/>
-            <a:ext cx="9144000" cy="6858000"/>
+            <a:ext cx="12191695" cy="6858000"/>
           </a:xfrm>
           <a:prstGeom prst="rect">
             <a:avLst/>
@@ -3152,8 +3152,8 @@
         </p:nvSpPr>
         <p:spPr>
           <a:xfrm>
-            <a:off x="914400" y="2286000"/>
-            <a:ext cx="7315200" cy="914400"/>
+            <a:off x="914400" y="1828800"/>
+            <a:ext cx="10360152" cy="1371600"/>
           </a:xfrm>
           <a:prstGeom prst="rect">
             <a:avLst/>
@@ -3187,8 +3187,8 @@
         </p:nvSpPr>
         <p:spPr>
           <a:xfrm>
-            <a:off x="914400" y="3474720"/>
-            <a:ext cx="7315200" cy="548640"/>
+            <a:off x="914400" y="3657600"/>
+            <a:ext cx="10360152" cy="548640"/>
           </a:xfrm>
           <a:prstGeom prst="rect">
             <a:avLst/>
@@ -3222,8 +3222,8 @@
         </p:nvSpPr>
         <p:spPr>
           <a:xfrm>
-            <a:off x="914400" y="4114800"/>
-            <a:ext cx="7315200" cy="548640"/>
+            <a:off x="914400" y="4297680"/>
+            <a:ext cx="10360152" cy="548640"/>
           </a:xfrm>
           <a:prstGeom prst="rect">
             <a:avLst/>
@@ -3276,7 +3276,7 @@
         <p:spPr>
           <a:xfrm>
             <a:off x="0" y="0"/>
-            <a:ext cx="9144000" cy="6858000"/>
+            <a:ext cx="12191695" cy="6858000"/>
           </a:xfrm>
           <a:prstGeom prst="rect">
             <a:avLst/>
@@ -3319,7 +3319,7 @@
         <p:spPr>
           <a:xfrm>
             <a:off x="0" y="0"/>
-            <a:ext cx="9144000" cy="137160"/>
+            <a:ext cx="12191695" cy="137160"/>
           </a:xfrm>
           <a:prstGeom prst="rect">
             <a:avLst/>
@@ -3362,7 +3362,7 @@
         <p:spPr>
           <a:xfrm>
             <a:off x="457200" y="365760"/>
-            <a:ext cx="8229600" cy="731520"/>
+            <a:ext cx="10972800" cy="731520"/>
           </a:xfrm>
           <a:prstGeom prst="rect">
             <a:avLst/>
@@ -3440,7 +3440,7 @@
         <p:spPr>
           <a:xfrm>
             <a:off x="640080" y="1371600"/>
-            <a:ext cx="7863840" cy="3657600"/>
+            <a:ext cx="10789920" cy="4572000"/>
           </a:xfrm>
           <a:prstGeom prst="rect">
             <a:avLst/>
@@ -3631,7 +3631,7 @@
         <p:spPr>
           <a:xfrm>
             <a:off x="0" y="0"/>
-            <a:ext cx="9144000" cy="6858000"/>
+            <a:ext cx="12191695" cy="6858000"/>
           </a:xfrm>
           <a:prstGeom prst="rect">
             <a:avLst/>
@@ -3674,7 +3674,7 @@
         <p:spPr>
           <a:xfrm>
             <a:off x="0" y="0"/>
-            <a:ext cx="9144000" cy="137160"/>
+            <a:ext cx="12191695" cy="137160"/>
           </a:xfrm>
           <a:prstGeom prst="rect">
             <a:avLst/>
@@ -3717,7 +3717,7 @@
         <p:spPr>
           <a:xfrm>
             <a:off x="457200" y="365760"/>
-            <a:ext cx="8229600" cy="731520"/>
+            <a:ext cx="10972800" cy="731520"/>
           </a:xfrm>
           <a:prstGeom prst="rect">
             <a:avLst/>
@@ -3795,7 +3795,7 @@
         <p:spPr>
           <a:xfrm>
             <a:off x="640080" y="1371600"/>
-            <a:ext cx="7863840" cy="3657600"/>
+            <a:ext cx="10789920" cy="4572000"/>
           </a:xfrm>
           <a:prstGeom prst="rect">
             <a:avLst/>
@@ -3911,7 +3911,7 @@
         <p:spPr>
           <a:xfrm>
             <a:off x="0" y="0"/>
-            <a:ext cx="9144000" cy="6858000"/>
+            <a:ext cx="12191695" cy="6858000"/>
           </a:xfrm>
           <a:prstGeom prst="rect">
             <a:avLst/>
@@ -3954,7 +3954,7 @@
         <p:spPr>
           <a:xfrm>
             <a:off x="0" y="0"/>
-            <a:ext cx="9144000" cy="137160"/>
+            <a:ext cx="12191695" cy="137160"/>
           </a:xfrm>
           <a:prstGeom prst="rect">
             <a:avLst/>
@@ -3997,7 +3997,7 @@
         <p:spPr>
           <a:xfrm>
             <a:off x="457200" y="365760"/>
-            <a:ext cx="8229600" cy="731520"/>
+            <a:ext cx="10972800" cy="731520"/>
           </a:xfrm>
           <a:prstGeom prst="rect">
             <a:avLst/>
@@ -4075,7 +4075,7 @@
         <p:spPr>
           <a:xfrm>
             <a:off x="640080" y="1371600"/>
-            <a:ext cx="7863840" cy="3657600"/>
+            <a:ext cx="10789920" cy="4572000"/>
           </a:xfrm>
           <a:prstGeom prst="rect">
             <a:avLst/>
@@ -4266,7 +4266,7 @@
         <p:spPr>
           <a:xfrm>
             <a:off x="0" y="0"/>
-            <a:ext cx="9144000" cy="6858000"/>
+            <a:ext cx="12191695" cy="6858000"/>
           </a:xfrm>
           <a:prstGeom prst="rect">
             <a:avLst/>
@@ -4309,7 +4309,7 @@
         <p:spPr>
           <a:xfrm>
             <a:off x="0" y="0"/>
-            <a:ext cx="9144000" cy="137160"/>
+            <a:ext cx="12191695" cy="137160"/>
           </a:xfrm>
           <a:prstGeom prst="rect">
             <a:avLst/>
@@ -4352,7 +4352,7 @@
         <p:spPr>
           <a:xfrm>
             <a:off x="457200" y="365760"/>
-            <a:ext cx="8229600" cy="731520"/>
+            <a:ext cx="10972800" cy="731520"/>
           </a:xfrm>
           <a:prstGeom prst="rect">
             <a:avLst/>
@@ -4430,7 +4430,7 @@
         <p:spPr>
           <a:xfrm>
             <a:off x="640080" y="1371600"/>
-            <a:ext cx="7863840" cy="3657600"/>
+            <a:ext cx="10789920" cy="4572000"/>
           </a:xfrm>
           <a:prstGeom prst="rect">
             <a:avLst/>
@@ -4621,7 +4621,7 @@
         <p:spPr>
           <a:xfrm>
             <a:off x="0" y="0"/>
-            <a:ext cx="9144000" cy="6858000"/>
+            <a:ext cx="12191695" cy="6858000"/>
           </a:xfrm>
           <a:prstGeom prst="rect">
             <a:avLst/>
@@ -4663,8 +4663,8 @@
         </p:nvSpPr>
         <p:spPr>
           <a:xfrm>
-            <a:off x="914400" y="2286000"/>
-            <a:ext cx="7315200" cy="914400"/>
+            <a:off x="914400" y="1828800"/>
+            <a:ext cx="10360152" cy="1371600"/>
           </a:xfrm>
           <a:prstGeom prst="rect">
             <a:avLst/>
@@ -4698,8 +4698,8 @@
         </p:nvSpPr>
         <p:spPr>
           <a:xfrm>
-            <a:off x="914400" y="3474720"/>
-            <a:ext cx="7315200" cy="548640"/>
+            <a:off x="914400" y="3657600"/>
+            <a:ext cx="10360152" cy="548640"/>
           </a:xfrm>
           <a:prstGeom prst="rect">
             <a:avLst/>
@@ -4733,8 +4733,8 @@
         </p:nvSpPr>
         <p:spPr>
           <a:xfrm>
-            <a:off x="914400" y="4114800"/>
-            <a:ext cx="7315200" cy="548640"/>
+            <a:off x="914400" y="4297680"/>
+            <a:ext cx="10360152" cy="548640"/>
           </a:xfrm>
           <a:prstGeom prst="rect">
             <a:avLst/>
@@ -4787,7 +4787,7 @@
         <p:spPr>
           <a:xfrm>
             <a:off x="0" y="0"/>
-            <a:ext cx="9144000" cy="6858000"/>
+            <a:ext cx="12191695" cy="6858000"/>
           </a:xfrm>
           <a:prstGeom prst="rect">
             <a:avLst/>
@@ -4830,7 +4830,7 @@
         <p:spPr>
           <a:xfrm>
             <a:off x="0" y="0"/>
-            <a:ext cx="9144000" cy="137160"/>
+            <a:ext cx="12191695" cy="137160"/>
           </a:xfrm>
           <a:prstGeom prst="rect">
             <a:avLst/>
@@ -4873,7 +4873,7 @@
         <p:spPr>
           <a:xfrm>
             <a:off x="457200" y="365760"/>
-            <a:ext cx="8229600" cy="731520"/>
+            <a:ext cx="10972800" cy="731520"/>
           </a:xfrm>
           <a:prstGeom prst="rect">
             <a:avLst/>
@@ -4951,7 +4951,7 @@
         <p:spPr>
           <a:xfrm>
             <a:off x="640080" y="1371600"/>
-            <a:ext cx="7863840" cy="3657600"/>
+            <a:ext cx="10789920" cy="4572000"/>
           </a:xfrm>
           <a:prstGeom prst="rect">
             <a:avLst/>
@@ -5142,7 +5142,7 @@
         <p:spPr>
           <a:xfrm>
             <a:off x="0" y="0"/>
-            <a:ext cx="9144000" cy="6858000"/>
+            <a:ext cx="12191695" cy="6858000"/>
           </a:xfrm>
           <a:prstGeom prst="rect">
             <a:avLst/>
@@ -5185,7 +5185,7 @@
         <p:spPr>
           <a:xfrm>
             <a:off x="0" y="0"/>
-            <a:ext cx="9144000" cy="137160"/>
+            <a:ext cx="12191695" cy="137160"/>
           </a:xfrm>
           <a:prstGeom prst="rect">
             <a:avLst/>
@@ -5228,7 +5228,7 @@
         <p:spPr>
           <a:xfrm>
             <a:off x="457200" y="365760"/>
-            <a:ext cx="8229600" cy="731520"/>
+            <a:ext cx="10972800" cy="731520"/>
           </a:xfrm>
           <a:prstGeom prst="rect">
             <a:avLst/>
@@ -5306,7 +5306,7 @@
         <p:spPr>
           <a:xfrm>
             <a:off x="640080" y="1371600"/>
-            <a:ext cx="7863840" cy="3657600"/>
+            <a:ext cx="10789920" cy="4572000"/>
           </a:xfrm>
           <a:prstGeom prst="rect">
             <a:avLst/>
@@ -5497,7 +5497,7 @@
         <p:spPr>
           <a:xfrm>
             <a:off x="0" y="0"/>
-            <a:ext cx="9144000" cy="6858000"/>
+            <a:ext cx="12191695" cy="6858000"/>
           </a:xfrm>
           <a:prstGeom prst="rect">
             <a:avLst/>
@@ -5540,7 +5540,7 @@
         <p:spPr>
           <a:xfrm>
             <a:off x="0" y="0"/>
-            <a:ext cx="9144000" cy="137160"/>
+            <a:ext cx="12191695" cy="137160"/>
           </a:xfrm>
           <a:prstGeom prst="rect">
             <a:avLst/>
@@ -5583,7 +5583,7 @@
         <p:spPr>
           <a:xfrm>
             <a:off x="457200" y="365760"/>
-            <a:ext cx="8229600" cy="731520"/>
+            <a:ext cx="10972800" cy="731520"/>
           </a:xfrm>
           <a:prstGeom prst="rect">
             <a:avLst/>
@@ -5661,7 +5661,7 @@
         <p:spPr>
           <a:xfrm>
             <a:off x="640080" y="1371600"/>
-            <a:ext cx="7863840" cy="3657600"/>
+            <a:ext cx="10789920" cy="4572000"/>
           </a:xfrm>
           <a:prstGeom prst="rect">
             <a:avLst/>
@@ -5747,7 +5747,7 @@
         <p:spPr>
           <a:xfrm>
             <a:off x="0" y="0"/>
-            <a:ext cx="9144000" cy="6858000"/>
+            <a:ext cx="12191695" cy="6858000"/>
           </a:xfrm>
           <a:prstGeom prst="rect">
             <a:avLst/>
@@ -5790,7 +5790,7 @@
         <p:spPr>
           <a:xfrm>
             <a:off x="0" y="0"/>
-            <a:ext cx="9144000" cy="137160"/>
+            <a:ext cx="12191695" cy="137160"/>
           </a:xfrm>
           <a:prstGeom prst="rect">
             <a:avLst/>
@@ -5833,7 +5833,7 @@
         <p:spPr>
           <a:xfrm>
             <a:off x="457200" y="365760"/>
-            <a:ext cx="8229600" cy="731520"/>
+            <a:ext cx="10972800" cy="731520"/>
           </a:xfrm>
           <a:prstGeom prst="rect">
             <a:avLst/>
@@ -5911,7 +5911,7 @@
         <p:spPr>
           <a:xfrm>
             <a:off x="640080" y="1371600"/>
-            <a:ext cx="7863840" cy="3657600"/>
+            <a:ext cx="10789920" cy="4572000"/>
           </a:xfrm>
           <a:prstGeom prst="rect">
             <a:avLst/>
@@ -6027,7 +6027,7 @@
         <p:spPr>
           <a:xfrm>
             <a:off x="0" y="0"/>
-            <a:ext cx="9144000" cy="6858000"/>
+            <a:ext cx="12191695" cy="6858000"/>
           </a:xfrm>
           <a:prstGeom prst="rect">
             <a:avLst/>
@@ -6070,7 +6070,7 @@
         <p:spPr>
           <a:xfrm>
             <a:off x="0" y="0"/>
-            <a:ext cx="9144000" cy="137160"/>
+            <a:ext cx="12191695" cy="137160"/>
           </a:xfrm>
           <a:prstGeom prst="rect">
             <a:avLst/>
@@ -6113,7 +6113,7 @@
         <p:spPr>
           <a:xfrm>
             <a:off x="457200" y="365760"/>
-            <a:ext cx="8229600" cy="731520"/>
+            <a:ext cx="10972800" cy="731520"/>
           </a:xfrm>
           <a:prstGeom prst="rect">
             <a:avLst/>
@@ -6191,7 +6191,7 @@
         <p:spPr>
           <a:xfrm>
             <a:off x="640080" y="1371600"/>
-            <a:ext cx="7863840" cy="3657600"/>
+            <a:ext cx="10789920" cy="4572000"/>
           </a:xfrm>
           <a:prstGeom prst="rect">
             <a:avLst/>
@@ -6307,7 +6307,7 @@
         <p:spPr>
           <a:xfrm>
             <a:off x="0" y="0"/>
-            <a:ext cx="9144000" cy="6858000"/>
+            <a:ext cx="12191695" cy="6858000"/>
           </a:xfrm>
           <a:prstGeom prst="rect">
             <a:avLst/>
@@ -6350,7 +6350,7 @@
         <p:spPr>
           <a:xfrm>
             <a:off x="0" y="0"/>
-            <a:ext cx="9144000" cy="137160"/>
+            <a:ext cx="12191695" cy="137160"/>
           </a:xfrm>
           <a:prstGeom prst="rect">
             <a:avLst/>
@@ -6393,7 +6393,7 @@
         <p:spPr>
           <a:xfrm>
             <a:off x="457200" y="365760"/>
-            <a:ext cx="8229600" cy="731520"/>
+            <a:ext cx="10972800" cy="731520"/>
           </a:xfrm>
           <a:prstGeom prst="rect">
             <a:avLst/>
@@ -6471,7 +6471,7 @@
         <p:spPr>
           <a:xfrm>
             <a:off x="640080" y="1371600"/>
-            <a:ext cx="7863840" cy="3657600"/>
+            <a:ext cx="10789920" cy="4572000"/>
           </a:xfrm>
           <a:prstGeom prst="rect">
             <a:avLst/>
@@ -6542,7 +6542,7 @@
         <p:spPr>
           <a:xfrm>
             <a:off x="0" y="0"/>
-            <a:ext cx="9144000" cy="6858000"/>
+            <a:ext cx="12191695" cy="6858000"/>
           </a:xfrm>
           <a:prstGeom prst="rect">
             <a:avLst/>
@@ -6585,7 +6585,7 @@
         <p:spPr>
           <a:xfrm>
             <a:off x="0" y="0"/>
-            <a:ext cx="9144000" cy="137160"/>
+            <a:ext cx="12191695" cy="137160"/>
           </a:xfrm>
           <a:prstGeom prst="rect">
             <a:avLst/>
@@ -6628,7 +6628,7 @@
         <p:spPr>
           <a:xfrm>
             <a:off x="457200" y="365760"/>
-            <a:ext cx="8229600" cy="731520"/>
+            <a:ext cx="10972800" cy="731520"/>
           </a:xfrm>
           <a:prstGeom prst="rect">
             <a:avLst/>
@@ -6706,7 +6706,7 @@
         <p:spPr>
           <a:xfrm>
             <a:off x="640080" y="1371600"/>
-            <a:ext cx="7863840" cy="3657600"/>
+            <a:ext cx="10789920" cy="4572000"/>
           </a:xfrm>
           <a:prstGeom prst="rect">
             <a:avLst/>
@@ -6807,7 +6807,7 @@
         <p:spPr>
           <a:xfrm>
             <a:off x="0" y="0"/>
-            <a:ext cx="9144000" cy="6858000"/>
+            <a:ext cx="12191695" cy="6858000"/>
           </a:xfrm>
           <a:prstGeom prst="rect">
             <a:avLst/>
@@ -6850,7 +6850,7 @@
         <p:spPr>
           <a:xfrm>
             <a:off x="914400" y="2286000"/>
-            <a:ext cx="7315200" cy="914400"/>
+            <a:ext cx="10360152" cy="1371600"/>
           </a:xfrm>
           <a:prstGeom prst="rect">
             <a:avLst/>
@@ -6884,8 +6884,8 @@
         </p:nvSpPr>
         <p:spPr>
           <a:xfrm>
-            <a:off x="914400" y="3474720"/>
-            <a:ext cx="7315200" cy="914400"/>
+            <a:off x="914400" y="3840480"/>
+            <a:ext cx="10360152" cy="914400"/>
           </a:xfrm>
           <a:prstGeom prst="rect">
             <a:avLst/>
